--- a/reports/Prezentare_Chatbot_FAQ.pptx
+++ b/reports/Prezentare_Chatbot_FAQ.pptx
@@ -202,9 +202,9 @@
           </c:dLbls>
           <c:cat>
             <c:multiLvlStrRef>
-              <c:f>Sheet1!$A$2:$A$4</c:f>
+              <c:f>Sheet1!$A$2:$A$5</c:f>
               <c:multiLvlStrCache>
-                <c:ptCount val="3"/>
+                <c:ptCount val="4"/>
                 <c:lvl>
                   <c:pt idx="0">
                     <c:v>Cuvinte-cheie</c:v>
@@ -213,7 +213,10 @@
                     <c:v>TF-IDF</c:v>
                   </c:pt>
                   <c:pt idx="2">
-                    <c:v>Semantic (LSA)</c:v>
+                    <c:v>LSA</c:v>
+                  </c:pt>
+                  <c:pt idx="3">
+                    <c:v>Combinat</c:v>
                   </c:pt>
                 </c:lvl>
               </c:multiLvlStrCache>
@@ -221,10 +224,10 @@
           </c:cat>
           <c:val>
             <c:numRef>
-              <c:f>Sheet1!$B$2:$B$4</c:f>
+              <c:f>Sheet1!$B$2:$B$5</c:f>
               <c:numCache>
                 <c:formatCode>General</c:formatCode>
-                <c:ptCount val="3"/>
+                <c:ptCount val="4"/>
                 <c:pt idx="0">
                   <c:v>0.5</c:v>
                 </c:pt>
@@ -233,6 +236,9 @@
                 </c:pt>
                 <c:pt idx="2">
                   <c:v>0.825</c:v>
+                </c:pt>
+                <c:pt idx="3">
+                  <c:v>0.85</c:v>
                 </c:pt>
               </c:numCache>
             </c:numRef>
@@ -285,9 +291,9 @@
           </c:dLbls>
           <c:cat>
             <c:multiLvlStrRef>
-              <c:f>Sheet1!$A$2:$A$4</c:f>
+              <c:f>Sheet1!$A$2:$A$5</c:f>
               <c:multiLvlStrCache>
-                <c:ptCount val="3"/>
+                <c:ptCount val="4"/>
                 <c:lvl>
                   <c:pt idx="0">
                     <c:v>Cuvinte-cheie</c:v>
@@ -296,7 +302,10 @@
                     <c:v>TF-IDF</c:v>
                   </c:pt>
                   <c:pt idx="2">
-                    <c:v>Semantic (LSA)</c:v>
+                    <c:v>LSA</c:v>
+                  </c:pt>
+                  <c:pt idx="3">
+                    <c:v>Combinat</c:v>
                   </c:pt>
                 </c:lvl>
               </c:multiLvlStrCache>
@@ -304,10 +313,10 @@
           </c:cat>
           <c:val>
             <c:numRef>
-              <c:f>Sheet1!$C$2:$C$4</c:f>
+              <c:f>Sheet1!$C$2:$C$5</c:f>
               <c:numCache>
                 <c:formatCode>General</c:formatCode>
-                <c:ptCount val="3"/>
+                <c:ptCount val="4"/>
                 <c:pt idx="0">
                   <c:v>0.675</c:v>
                 </c:pt>
@@ -316,6 +325,9 @@
                 </c:pt>
                 <c:pt idx="2">
                   <c:v>0.925</c:v>
+                </c:pt>
+                <c:pt idx="3">
+                  <c:v>0.95</c:v>
                 </c:pt>
               </c:numCache>
             </c:numRef>
@@ -368,9 +380,9 @@
           </c:dLbls>
           <c:cat>
             <c:multiLvlStrRef>
-              <c:f>Sheet1!$A$2:$A$4</c:f>
+              <c:f>Sheet1!$A$2:$A$5</c:f>
               <c:multiLvlStrCache>
-                <c:ptCount val="3"/>
+                <c:ptCount val="4"/>
                 <c:lvl>
                   <c:pt idx="0">
                     <c:v>Cuvinte-cheie</c:v>
@@ -379,7 +391,10 @@
                     <c:v>TF-IDF</c:v>
                   </c:pt>
                   <c:pt idx="2">
-                    <c:v>Semantic (LSA)</c:v>
+                    <c:v>LSA</c:v>
+                  </c:pt>
+                  <c:pt idx="3">
+                    <c:v>Combinat</c:v>
                   </c:pt>
                 </c:lvl>
               </c:multiLvlStrCache>
@@ -387,10 +402,10 @@
           </c:cat>
           <c:val>
             <c:numRef>
-              <c:f>Sheet1!$D$2:$D$4</c:f>
+              <c:f>Sheet1!$D$2:$D$5</c:f>
               <c:numCache>
                 <c:formatCode>General</c:formatCode>
-                <c:ptCount val="3"/>
+                <c:ptCount val="4"/>
                 <c:pt idx="0">
                   <c:v>0.8</c:v>
                 </c:pt>
@@ -398,6 +413,9 @@
                   <c:v>0.975</c:v>
                 </c:pt>
                 <c:pt idx="2">
+                  <c:v>0.975</c:v>
+                </c:pt>
+                <c:pt idx="3">
                   <c:v>0.975</c:v>
                 </c:pt>
               </c:numCache>
@@ -3933,7 +3951,7 @@
                 <a:ea typeface="Calibri" pitchFamily="34" charset="-122"/>
                 <a:cs typeface="Calibri" pitchFamily="34" charset="-120"/>
               </a:rPr>
-              <a:t>Trei metode, de la simplu la semantic</a:t>
+              <a:t>Patru metode, de la simplu la combinat</a:t>
             </a:r>
             <a:endParaRPr lang="en-US" sz="3000" dirty="0"/>
           </a:p>
@@ -3947,12 +3965,12 @@
         </p:nvSpPr>
         <p:spPr>
           <a:xfrm>
-            <a:off x="457200" y="1143000"/>
-            <a:ext cx="2606040" cy="2651760"/>
+            <a:off x="365760" y="1143000"/>
+            <a:ext cx="2011680" cy="2651760"/>
           </a:xfrm>
           <a:prstGeom prst="roundRect">
             <a:avLst>
-              <a:gd name="adj" fmla="val 4211"/>
+              <a:gd name="adj" fmla="val 5455"/>
             </a:avLst>
           </a:prstGeom>
           <a:solidFill>
@@ -3969,8 +3987,8 @@
         </p:nvSpPr>
         <p:spPr>
           <a:xfrm>
-            <a:off x="640080" y="1371600"/>
-            <a:ext cx="2240280" cy="411480"/>
+            <a:off x="512064" y="1325880"/>
+            <a:ext cx="1737360" cy="594360"/>
           </a:xfrm>
           <a:prstGeom prst="rect">
             <a:avLst/>
@@ -3986,7 +4004,7 @@
               <a:buNone/>
             </a:pPr>
             <a:r>
-              <a:rPr lang="en-US" sz="1700" b="1" dirty="0">
+              <a:rPr lang="en-US" sz="1400" b="1" dirty="0">
                 <a:solidFill>
                   <a:srgbClr val="1E2761"/>
                 </a:solidFill>
@@ -3996,7 +4014,7 @@
               </a:rPr>
               <a:t>1. Cuvinte-cheie</a:t>
             </a:r>
-            <a:endParaRPr lang="en-US" sz="1700" dirty="0"/>
+            <a:endParaRPr lang="en-US" sz="1400" dirty="0"/>
           </a:p>
         </p:txBody>
       </p:sp>
@@ -4008,8 +4026,8 @@
         </p:nvSpPr>
         <p:spPr>
           <a:xfrm>
-            <a:off x="640080" y="1783080"/>
-            <a:ext cx="2240280" cy="274320"/>
+            <a:off x="512064" y="1874520"/>
+            <a:ext cx="1737360" cy="274320"/>
           </a:xfrm>
           <a:prstGeom prst="rect">
             <a:avLst/>
@@ -4025,7 +4043,7 @@
               <a:buNone/>
             </a:pPr>
             <a:r>
-              <a:rPr lang="en-US" sz="1100" i="1" dirty="0">
+              <a:rPr lang="en-US" sz="1000" i="1" dirty="0">
                 <a:solidFill>
                   <a:srgbClr val="5A6377"/>
                 </a:solidFill>
@@ -4035,7 +4053,7 @@
               </a:rPr>
               <a:t>varianta de bază</a:t>
             </a:r>
-            <a:endParaRPr lang="en-US" sz="1100" dirty="0"/>
+            <a:endParaRPr lang="en-US" sz="1000" dirty="0"/>
           </a:p>
         </p:txBody>
       </p:sp>
@@ -4047,8 +4065,8 @@
         </p:nvSpPr>
         <p:spPr>
           <a:xfrm>
-            <a:off x="640080" y="2148840"/>
-            <a:ext cx="2240280" cy="1463040"/>
+            <a:off x="512064" y="2194560"/>
+            <a:ext cx="1737360" cy="1508760"/>
           </a:xfrm>
           <a:prstGeom prst="rect">
             <a:avLst/>
@@ -4064,7 +4082,7 @@
               <a:buNone/>
             </a:pPr>
             <a:r>
-              <a:rPr lang="en-US" sz="1250" dirty="0">
+              <a:rPr lang="en-US" sz="1050" dirty="0">
                 <a:solidFill>
                   <a:srgbClr val="1A1A2E"/>
                 </a:solidFill>
@@ -4072,9 +4090,9 @@
                 <a:ea typeface="Calibri" pitchFamily="34" charset="-122"/>
                 <a:cs typeface="Calibri" pitchFamily="34" charset="-120"/>
               </a:rPr>
-              <a:t>Similaritate Jaccard între mulțimile de cuvinte normalizate. Rapidă și interpretabilă, dar cere potriviri exacte.</a:t>
-            </a:r>
-            <a:endParaRPr lang="en-US" sz="1250" dirty="0"/>
+              <a:t>Similaritate Jaccard pe mulțimi de cuvinte. Rapidă și interpretabilă, dar cere potriviri exacte.</a:t>
+            </a:r>
+            <a:endParaRPr lang="en-US" sz="1050" dirty="0"/>
           </a:p>
         </p:txBody>
       </p:sp>
@@ -4086,12 +4104,12 @@
         </p:nvSpPr>
         <p:spPr>
           <a:xfrm>
-            <a:off x="3291840" y="1143000"/>
-            <a:ext cx="2606040" cy="2651760"/>
+            <a:off x="2514600" y="1143000"/>
+            <a:ext cx="2011680" cy="2651760"/>
           </a:xfrm>
           <a:prstGeom prst="roundRect">
             <a:avLst>
-              <a:gd name="adj" fmla="val 4211"/>
+              <a:gd name="adj" fmla="val 5455"/>
             </a:avLst>
           </a:prstGeom>
           <a:solidFill>
@@ -4108,8 +4126,8 @@
         </p:nvSpPr>
         <p:spPr>
           <a:xfrm>
-            <a:off x="3474720" y="1371600"/>
-            <a:ext cx="2240280" cy="411480"/>
+            <a:off x="2660904" y="1325880"/>
+            <a:ext cx="1737360" cy="594360"/>
           </a:xfrm>
           <a:prstGeom prst="rect">
             <a:avLst/>
@@ -4125,7 +4143,7 @@
               <a:buNone/>
             </a:pPr>
             <a:r>
-              <a:rPr lang="en-US" sz="1700" b="1" dirty="0">
+              <a:rPr lang="en-US" sz="1400" b="1" dirty="0">
                 <a:solidFill>
                   <a:srgbClr val="1E2761"/>
                 </a:solidFill>
@@ -4135,7 +4153,7 @@
               </a:rPr>
               <a:t>2. TF-IDF + cosinus</a:t>
             </a:r>
-            <a:endParaRPr lang="en-US" sz="1700" dirty="0"/>
+            <a:endParaRPr lang="en-US" sz="1400" dirty="0"/>
           </a:p>
         </p:txBody>
       </p:sp>
@@ -4147,8 +4165,8 @@
         </p:nvSpPr>
         <p:spPr>
           <a:xfrm>
-            <a:off x="3474720" y="1783080"/>
-            <a:ext cx="2240280" cy="274320"/>
+            <a:off x="2660904" y="1874520"/>
+            <a:ext cx="1737360" cy="274320"/>
           </a:xfrm>
           <a:prstGeom prst="rect">
             <a:avLst/>
@@ -4164,7 +4182,7 @@
               <a:buNone/>
             </a:pPr>
             <a:r>
-              <a:rPr lang="en-US" sz="1100" i="1" dirty="0">
+              <a:rPr lang="en-US" sz="1000" i="1" dirty="0">
                 <a:solidFill>
                   <a:srgbClr val="5A6377"/>
                 </a:solidFill>
@@ -4174,7 +4192,7 @@
               </a:rPr>
               <a:t>îmbunătățirea 1</a:t>
             </a:r>
-            <a:endParaRPr lang="en-US" sz="1100" dirty="0"/>
+            <a:endParaRPr lang="en-US" sz="1000" dirty="0"/>
           </a:p>
         </p:txBody>
       </p:sp>
@@ -4186,8 +4204,8 @@
         </p:nvSpPr>
         <p:spPr>
           <a:xfrm>
-            <a:off x="3474720" y="2148840"/>
-            <a:ext cx="2240280" cy="1463040"/>
+            <a:off x="2660904" y="2194560"/>
+            <a:ext cx="1737360" cy="1508760"/>
           </a:xfrm>
           <a:prstGeom prst="rect">
             <a:avLst/>
@@ -4203,7 +4221,7 @@
               <a:buNone/>
             </a:pPr>
             <a:r>
-              <a:rPr lang="en-US" sz="1250" dirty="0">
+              <a:rPr lang="en-US" sz="1050" dirty="0">
                 <a:solidFill>
                   <a:srgbClr val="1A1A2E"/>
                 </a:solidFill>
@@ -4211,9 +4229,9 @@
                 <a:ea typeface="Calibri" pitchFamily="34" charset="-122"/>
                 <a:cs typeface="Calibri" pitchFamily="34" charset="-120"/>
               </a:rPr>
-              <a:t>Cuvinte (1–2 grame) + n-grame de caractere (3–5): robustețe la flexiuni, diacritice și greșeli de tastare.</a:t>
-            </a:r>
-            <a:endParaRPr lang="en-US" sz="1250" dirty="0"/>
+              <a:t>Cuvinte (1–2 gr.) + n-grame de caractere (3–5): robustețe la flexiuni și greșeli de tastare.</a:t>
+            </a:r>
+            <a:endParaRPr lang="en-US" sz="1050" dirty="0"/>
           </a:p>
         </p:txBody>
       </p:sp>
@@ -4225,12 +4243,151 @@
         </p:nvSpPr>
         <p:spPr>
           <a:xfrm>
-            <a:off x="6126480" y="1143000"/>
-            <a:ext cx="2606040" cy="2651760"/>
+            <a:off x="4663440" y="1143000"/>
+            <a:ext cx="2011680" cy="2651760"/>
           </a:xfrm>
           <a:prstGeom prst="roundRect">
             <a:avLst>
-              <a:gd name="adj" fmla="val 4211"/>
+              <a:gd name="adj" fmla="val 5455"/>
+            </a:avLst>
+          </a:prstGeom>
+          <a:solidFill>
+            <a:srgbClr val="F4F7FC"/>
+          </a:solidFill>
+          <a:ln/>
+        </p:spPr>
+      </p:sp>
+      <p:sp>
+        <p:nvSpPr>
+          <p:cNvPr id="12" name="Text 10"/>
+          <p:cNvSpPr/>
+          <p:nvPr/>
+        </p:nvSpPr>
+        <p:spPr>
+          <a:xfrm>
+            <a:off x="4809744" y="1325880"/>
+            <a:ext cx="1737360" cy="594360"/>
+          </a:xfrm>
+          <a:prstGeom prst="rect">
+            <a:avLst/>
+          </a:prstGeom>
+          <a:noFill/>
+          <a:ln/>
+        </p:spPr>
+        <p:txBody>
+          <a:bodyPr wrap="square" lIns="0" tIns="0" rIns="0" bIns="0" rtlCol="0" anchor="ctr"/>
+          <a:lstStyle/>
+          <a:p>
+            <a:pPr indent="0" marL="0">
+              <a:buNone/>
+            </a:pPr>
+            <a:r>
+              <a:rPr lang="en-US" sz="1400" b="1" dirty="0">
+                <a:solidFill>
+                  <a:srgbClr val="1E2761"/>
+                </a:solidFill>
+                <a:latin typeface="Calibri" pitchFamily="34" charset="0"/>
+                <a:ea typeface="Calibri" pitchFamily="34" charset="-122"/>
+                <a:cs typeface="Calibri" pitchFamily="34" charset="-120"/>
+              </a:rPr>
+              <a:t>3. Semantic (LSA)</a:t>
+            </a:r>
+            <a:endParaRPr lang="en-US" sz="1400" dirty="0"/>
+          </a:p>
+        </p:txBody>
+      </p:sp>
+      <p:sp>
+        <p:nvSpPr>
+          <p:cNvPr id="13" name="Text 11"/>
+          <p:cNvSpPr/>
+          <p:nvPr/>
+        </p:nvSpPr>
+        <p:spPr>
+          <a:xfrm>
+            <a:off x="4809744" y="1874520"/>
+            <a:ext cx="1737360" cy="274320"/>
+          </a:xfrm>
+          <a:prstGeom prst="rect">
+            <a:avLst/>
+          </a:prstGeom>
+          <a:noFill/>
+          <a:ln/>
+        </p:spPr>
+        <p:txBody>
+          <a:bodyPr wrap="square" lIns="0" tIns="0" rIns="0" bIns="0" rtlCol="0" anchor="ctr"/>
+          <a:lstStyle/>
+          <a:p>
+            <a:pPr indent="0" marL="0">
+              <a:buNone/>
+            </a:pPr>
+            <a:r>
+              <a:rPr lang="en-US" sz="1000" i="1" dirty="0">
+                <a:solidFill>
+                  <a:srgbClr val="5A6377"/>
+                </a:solidFill>
+                <a:latin typeface="Calibri" pitchFamily="34" charset="0"/>
+                <a:ea typeface="Calibri" pitchFamily="34" charset="-122"/>
+                <a:cs typeface="Calibri" pitchFamily="34" charset="-120"/>
+              </a:rPr>
+              <a:t>îmbunătățirea 2</a:t>
+            </a:r>
+            <a:endParaRPr lang="en-US" sz="1000" dirty="0"/>
+          </a:p>
+        </p:txBody>
+      </p:sp>
+      <p:sp>
+        <p:nvSpPr>
+          <p:cNvPr id="14" name="Text 12"/>
+          <p:cNvSpPr/>
+          <p:nvPr/>
+        </p:nvSpPr>
+        <p:spPr>
+          <a:xfrm>
+            <a:off x="4809744" y="2194560"/>
+            <a:ext cx="1737360" cy="1508760"/>
+          </a:xfrm>
+          <a:prstGeom prst="rect">
+            <a:avLst/>
+          </a:prstGeom>
+          <a:noFill/>
+          <a:ln/>
+        </p:spPr>
+        <p:txBody>
+          <a:bodyPr wrap="square" lIns="0" tIns="0" rIns="0" bIns="0" rtlCol="0" anchor="t"/>
+          <a:lstStyle/>
+          <a:p>
+            <a:pPr indent="0" marL="0">
+              <a:buNone/>
+            </a:pPr>
+            <a:r>
+              <a:rPr lang="en-US" sz="1050" dirty="0">
+                <a:solidFill>
+                  <a:srgbClr val="1A1A2E"/>
+                </a:solidFill>
+                <a:latin typeface="Calibri" pitchFamily="34" charset="0"/>
+                <a:ea typeface="Calibri" pitchFamily="34" charset="-122"/>
+                <a:cs typeface="Calibri" pitchFamily="34" charset="-120"/>
+              </a:rPr>
+              <a:t>TF-IDF proiectat cu TruncatedSVD în 30 dim. latente → embeddings; potrivire fără cuvinte comune.</a:t>
+            </a:r>
+            <a:endParaRPr lang="en-US" sz="1050" dirty="0"/>
+          </a:p>
+        </p:txBody>
+      </p:sp>
+      <p:sp>
+        <p:nvSpPr>
+          <p:cNvPr id="15" name="Shape 13"/>
+          <p:cNvSpPr/>
+          <p:nvPr/>
+        </p:nvSpPr>
+        <p:spPr>
+          <a:xfrm>
+            <a:off x="6812280" y="1143000"/>
+            <a:ext cx="2011680" cy="2651760"/>
+          </a:xfrm>
+          <a:prstGeom prst="roundRect">
+            <a:avLst>
+              <a:gd name="adj" fmla="val 5455"/>
             </a:avLst>
           </a:prstGeom>
           <a:solidFill>
@@ -4241,14 +4398,14 @@
       </p:sp>
       <p:sp>
         <p:nvSpPr>
-          <p:cNvPr id="12" name="Text 10"/>
-          <p:cNvSpPr/>
-          <p:nvPr/>
-        </p:nvSpPr>
-        <p:spPr>
-          <a:xfrm>
-            <a:off x="6309360" y="1371600"/>
-            <a:ext cx="2240280" cy="411480"/>
+          <p:cNvPr id="16" name="Text 14"/>
+          <p:cNvSpPr/>
+          <p:nvPr/>
+        </p:nvSpPr>
+        <p:spPr>
+          <a:xfrm>
+            <a:off x="6958584" y="1325880"/>
+            <a:ext cx="1737360" cy="594360"/>
           </a:xfrm>
           <a:prstGeom prst="rect">
             <a:avLst/>
@@ -4264,7 +4421,7 @@
               <a:buNone/>
             </a:pPr>
             <a:r>
-              <a:rPr lang="en-US" sz="1700" b="1" dirty="0">
+              <a:rPr lang="en-US" sz="1400" b="1" dirty="0">
                 <a:solidFill>
                   <a:srgbClr val="FFFFFF"/>
                 </a:solidFill>
@@ -4272,22 +4429,22 @@
                 <a:ea typeface="Calibri" pitchFamily="34" charset="-122"/>
                 <a:cs typeface="Calibri" pitchFamily="34" charset="-120"/>
               </a:rPr>
-              <a:t>3. Semantic (LSA)</a:t>
-            </a:r>
-            <a:endParaRPr lang="en-US" sz="1700" dirty="0"/>
-          </a:p>
-        </p:txBody>
-      </p:sp>
-      <p:sp>
-        <p:nvSpPr>
-          <p:cNvPr id="13" name="Text 11"/>
-          <p:cNvSpPr/>
-          <p:nvPr/>
-        </p:nvSpPr>
-        <p:spPr>
-          <a:xfrm>
-            <a:off x="6309360" y="1783080"/>
-            <a:ext cx="2240280" cy="274320"/>
+              <a:t>4. Combinat</a:t>
+            </a:r>
+            <a:endParaRPr lang="en-US" sz="1400" dirty="0"/>
+          </a:p>
+        </p:txBody>
+      </p:sp>
+      <p:sp>
+        <p:nvSpPr>
+          <p:cNvPr id="17" name="Text 15"/>
+          <p:cNvSpPr/>
+          <p:nvPr/>
+        </p:nvSpPr>
+        <p:spPr>
+          <a:xfrm>
+            <a:off x="6958584" y="1874520"/>
+            <a:ext cx="1737360" cy="274320"/>
           </a:xfrm>
           <a:prstGeom prst="rect">
             <a:avLst/>
@@ -4303,7 +4460,7 @@
               <a:buNone/>
             </a:pPr>
             <a:r>
-              <a:rPr lang="en-US" sz="1100" i="1" dirty="0">
+              <a:rPr lang="en-US" sz="1000" i="1" dirty="0">
                 <a:solidFill>
                   <a:srgbClr val="CADCFC"/>
                 </a:solidFill>
@@ -4311,22 +4468,22 @@
                 <a:ea typeface="Calibri" pitchFamily="34" charset="-122"/>
                 <a:cs typeface="Calibri" pitchFamily="34" charset="-120"/>
               </a:rPr>
-              <a:t>îmbunătățirea 2</a:t>
-            </a:r>
-            <a:endParaRPr lang="en-US" sz="1100" dirty="0"/>
-          </a:p>
-        </p:txBody>
-      </p:sp>
-      <p:sp>
-        <p:nvSpPr>
-          <p:cNvPr id="14" name="Text 12"/>
-          <p:cNvSpPr/>
-          <p:nvPr/>
-        </p:nvSpPr>
-        <p:spPr>
-          <a:xfrm>
-            <a:off x="6309360" y="2148840"/>
-            <a:ext cx="2240280" cy="1463040"/>
+              <a:t>îmbunătățirea 3</a:t>
+            </a:r>
+            <a:endParaRPr lang="en-US" sz="1000" dirty="0"/>
+          </a:p>
+        </p:txBody>
+      </p:sp>
+      <p:sp>
+        <p:nvSpPr>
+          <p:cNvPr id="18" name="Text 16"/>
+          <p:cNvSpPr/>
+          <p:nvPr/>
+        </p:nvSpPr>
+        <p:spPr>
+          <a:xfrm>
+            <a:off x="6958584" y="2194560"/>
+            <a:ext cx="1737360" cy="1508760"/>
           </a:xfrm>
           <a:prstGeom prst="rect">
             <a:avLst/>
@@ -4342,7 +4499,7 @@
               <a:buNone/>
             </a:pPr>
             <a:r>
-              <a:rPr lang="en-US" sz="1250" dirty="0">
+              <a:rPr lang="en-US" sz="1050" dirty="0">
                 <a:solidFill>
                   <a:srgbClr val="FFFFFF"/>
                 </a:solidFill>
@@ -4350,15 +4507,15 @@
                 <a:ea typeface="Calibri" pitchFamily="34" charset="-122"/>
                 <a:cs typeface="Calibri" pitchFamily="34" charset="-120"/>
               </a:rPr>
-              <a:t>TF-IDF proiectat cu TruncatedSVD în 30 de dimensiuni latente → embeddings; potrivire fără cuvinte comune.</a:t>
-            </a:r>
-            <a:endParaRPr lang="en-US" sz="1250" dirty="0"/>
-          </a:p>
-        </p:txBody>
-      </p:sp>
-      <p:sp>
-        <p:nvSpPr>
-          <p:cNvPr id="15" name="Text 13"/>
+              <a:t>Media ponderată a scorurilor (0.2/0.4/0.4): metodele greșesc diferit și se corectează reciproc.</a:t>
+            </a:r>
+            <a:endParaRPr lang="en-US" sz="1050" dirty="0"/>
+          </a:p>
+        </p:txBody>
+      </p:sp>
+      <p:sp>
+        <p:nvSpPr>
+          <p:cNvPr id="19" name="Text 17"/>
           <p:cNvSpPr/>
           <p:nvPr/>
         </p:nvSpPr>
@@ -4537,7 +4694,7 @@
                 <a:ea typeface="Calibri" pitchFamily="34" charset="-122"/>
                 <a:cs typeface="Calibri" pitchFamily="34" charset="-120"/>
               </a:rPr>
-              <a:t>0.50 → 0.83</a:t>
+              <a:t>0.50 → 0.85</a:t>
             </a:r>
             <a:endParaRPr lang="en-US" sz="2800" dirty="0"/>
           </a:p>
@@ -4576,7 +4733,7 @@
                 <a:ea typeface="Calibri" pitchFamily="34" charset="-122"/>
                 <a:cs typeface="Calibri" pitchFamily="34" charset="-120"/>
               </a:rPr>
-              <a:t>recall@1: +65% relativ față de</a:t>
+              <a:t>recall@1: +70% relativ față de</a:t>
             </a:r>
             <a:endParaRPr lang="en-US" sz="1150" dirty="0"/>
           </a:p>
@@ -4593,7 +4750,7 @@
                 <a:ea typeface="Calibri" pitchFamily="34" charset="-122"/>
                 <a:cs typeface="Calibri" pitchFamily="34" charset="-120"/>
               </a:rPr>
-              <a:t>varianta de bază (20/40 → 33/40)</a:t>
+              <a:t>varianta de bază (20/40 → 34/40)</a:t>
             </a:r>
             <a:endParaRPr lang="en-US" sz="1150" dirty="0"/>
           </a:p>
@@ -4654,7 +4811,7 @@
                 <a:ea typeface="Calibri" pitchFamily="34" charset="-122"/>
                 <a:cs typeface="Calibri" pitchFamily="34" charset="-120"/>
               </a:rPr>
-              <a:t>MRR 0.88</a:t>
+              <a:t>MRR 0.90</a:t>
             </a:r>
             <a:pPr algn="ctr" indent="0" marL="0">
               <a:buNone/>
@@ -4668,7 +4825,7 @@
                 <a:ea typeface="Calibri" pitchFamily="34" charset="-122"/>
                 <a:cs typeface="Calibri" pitchFamily="34" charset="-120"/>
               </a:rPr>
-              <a:t>  ·  &lt; 5 ms / întrebare</a:t>
+              <a:t>  ·  &lt; 10 ms / întrebare</a:t>
             </a:r>
             <a:endParaRPr lang="en-US" sz="1600" dirty="0"/>
           </a:p>
@@ -4707,7 +4864,7 @@
                 <a:ea typeface="Calibri" pitchFamily="34" charset="-122"/>
                 <a:cs typeface="Calibri" pitchFamily="34" charset="-120"/>
               </a:rPr>
-              <a:t>39/40 întrebări rezolvate în primele 5 rezultate</a:t>
+              <a:t>39/40 întrebări rezolvate în primele 5 rezultate; metoda combinată câștigă prin vot</a:t>
             </a:r>
             <a:endParaRPr lang="en-US" sz="1200" dirty="0"/>
           </a:p>
@@ -5348,7 +5505,7 @@
                 <a:ea typeface="Calibri" pitchFamily="34" charset="-122"/>
                 <a:cs typeface="Calibri" pitchFamily="34" charset="-120"/>
               </a:rPr>
-              <a:t>Lanț complet de proiect ML: date proprii → variantă de bază → două îmbunătățiri → evaluare → analiza erorilor</a:t>
+              <a:t>Lanț complet de proiect ML: date proprii → variantă de bază → trei îmbunătățiri → evaluare → analiza erorilor</a:t>
             </a:r>
             <a:endParaRPr lang="en-US" sz="1600" dirty="0"/>
           </a:p>
@@ -5369,7 +5526,7 @@
                 <a:ea typeface="Calibri" pitchFamily="34" charset="-122"/>
                 <a:cs typeface="Calibri" pitchFamily="34" charset="-120"/>
               </a:rPr>
-              <a:t>Căutarea semantică rezolvă 33/40 de întrebări din prima (față de 20/40 pentru cuvinte-cheie)</a:t>
+              <a:t>Metoda combinată (medie ponderată a celor trei) rezolvă 34/40 din prima (față de 20/40 la bază)</a:t>
             </a:r>
             <a:endParaRPr lang="en-US" sz="1600" dirty="0"/>
           </a:p>
